--- a/content/decks/media-studies/media-studies-s1-lesson-16-end-of-term-exam-and-return.pptx
+++ b/content/decks/media-studies/media-studies-s1-lesson-16-end-of-term-exam-and-return.pptx
@@ -1039,7 +1039,7 @@
           <a:p>
             <a:r>
               <a:rPr lang="en-US" dirty="0"/>
-              <a:t>Monet's winter field: stillness after effort. The semester's close is the quiet in which the evidence is read.</a:t>
+              <a:t>Monet's winter field, after the effort. Use it to slow the room down before the scripts come back.</a:t>
             </a:r>
             <a:endParaRPr lang="en-US" dirty="0"/>
           </a:p>
@@ -3507,7 +3507,7 @@
       </p:grpSpPr>
       <p:pic>
         <p:nvPicPr>
-          <p:cNvPr id="2" name="Image 0" descr="/private/tmp/claude-501/-Users-dogan-Documents-Vaults-Courses/a3a5132d-721f-4cd4-8ddd-e62e2b37b51b/scratchpad/img/crops/monet-magpie_a1777.jpg">    </p:cNvPr>
+          <p:cNvPr id="2" name="Image 0" descr="/Users/dogan/Documents/Vaults/Courses/wiki/classes/media-studies/decks/_build/img/crops/monet-magpie_a1777.jpg">    </p:cNvPr>
           <p:cNvPicPr>
             <a:picLocks noChangeAspect="1"/>
           </p:cNvPicPr>
@@ -3582,7 +3582,7 @@
                 <a:ea typeface="Arial" pitchFamily="34" charset="-122"/>
                 <a:cs typeface="Arial" pitchFamily="34" charset="-120"/>
               </a:rPr>
-              <a:t>WINTER LIGHT, AND THE QUIET AFTER</a:t>
+              <a:t>THE WORK IS DONE AND SAT</a:t>
             </a:r>
             <a:endParaRPr lang="en-US" sz="1100" dirty="0"/>
           </a:p>
@@ -3667,7 +3667,7 @@
                 <a:ea typeface="Georgia" pitchFamily="34" charset="-122"/>
                 <a:cs typeface="Georgia" pitchFamily="34" charset="-120"/>
               </a:rPr>
-              <a:t>The work is done and sat; what is left is the calm, and the evidence of a term's growing.</a:t>
+              <a:t>The paper is written. What is left is the reading of what it says about the term.</a:t>
             </a:r>
             <a:endParaRPr lang="en-US" sz="1800" dirty="0"/>
           </a:p>
@@ -4640,7 +4640,7 @@
                 <a:ea typeface="Arial" pitchFamily="34" charset="-122"/>
                 <a:cs typeface="Arial" pitchFamily="34" charset="-120"/>
               </a:rPr>
-              <a:t>The distance between what you thought you wrote and what you scored: A1, A3, A4, EoT. That it narrowed is the semester's quietest success, and worth saying out loud.</a:t>
+              <a:t>The distance between what you thought you wrote and what you scored: A1, A3, A4, EoT. For most of you it narrowed. Say that out loud, with the numbers.</a:t>
             </a:r>
             <a:endParaRPr lang="en-US" sz="1350" dirty="0"/>
           </a:p>
@@ -4877,7 +4877,7 @@
                 <a:ea typeface="Georgia" pitchFamily="34" charset="-122"/>
                 <a:cs typeface="Georgia" pitchFamily="34" charset="-120"/>
               </a:rPr>
-              <a:t>C1 goes to Cambridge in the spring; the film-industry case study opens Section B properly; Paper 2 sits in June. Two artifacts make the crossing and keep the course alive over the break: the theory-card deck built since Lesson 02, and the case-study document opened at Lesson 12. Everything else can be rebuilt; these two are the memory.</a:t>
+              <a:t>First, the September wager re-run: 'I'm not impacted by media', hands up, the count recorded next to week one's. Then C1 goes to Cambridge in the spring; the film-industry case study opens Section B properly; Paper 2 sits in June. Two artifacts make the crossing: the theory-card deck built since Lesson 02, and the case-study document opened at Lesson 12. These two are the memory.</a:t>
             </a:r>
             <a:endParaRPr lang="en-US" sz="1900" dirty="0"/>
           </a:p>
